--- a/Calendario2025/Presentaciones/4_MediosComunicacion.pptx
+++ b/Calendario2025/Presentaciones/4_MediosComunicacion.pptx
@@ -153,6 +153,35 @@
 </p:presentation>
 </file>
 
+<file path=ppt/revisionInfo.xml><?xml version="1.0" encoding="utf-8"?>
+<p1510:revInfo xmlns:a="http://schemas.openxmlformats.org/drawingml/2006/main" xmlns:r="http://schemas.openxmlformats.org/officeDocument/2006/relationships" xmlns:p1510="http://schemas.microsoft.com/office/powerpoint/2015/10/main">
+  <p1510:revLst>
+    <p1510:client id="{F20B2AC7-0EB2-417C-A0FE-61002580A102}" v="3" dt="2026-05-12T17:39:35.634"/>
+  </p1510:revLst>
+</p1510:revInfo>
+</file>
+
+<file path=ppt/changesInfos/changesInfo1.xml><?xml version="1.0" encoding="utf-8"?>
+<pc:chgInfo xmlns:a="http://schemas.openxmlformats.org/drawingml/2006/main" xmlns:r="http://schemas.openxmlformats.org/officeDocument/2006/relationships" xmlns:ac="http://schemas.microsoft.com/office/drawing/2013/main/command" xmlns:pc="http://schemas.microsoft.com/office/powerpoint/2013/main/command">
+  <pc:docChgLst>
+    <pc:chgData name="Lizethe Pérez Fuertes" userId="4ae9ef87-2a7d-42f8-8dfa-0a501a9e2ff4" providerId="ADAL" clId="{FDDD45CB-1330-4033-A842-3D2746AFF7C7}"/>
+    <pc:docChg chg="modSld">
+      <pc:chgData name="Lizethe Pérez Fuertes" userId="4ae9ef87-2a7d-42f8-8dfa-0a501a9e2ff4" providerId="ADAL" clId="{FDDD45CB-1330-4033-A842-3D2746AFF7C7}" dt="2026-05-12T17:39:35.634" v="2"/>
+      <pc:docMkLst>
+        <pc:docMk/>
+      </pc:docMkLst>
+      <pc:sldChg chg="modAnim">
+        <pc:chgData name="Lizethe Pérez Fuertes" userId="4ae9ef87-2a7d-42f8-8dfa-0a501a9e2ff4" providerId="ADAL" clId="{FDDD45CB-1330-4033-A842-3D2746AFF7C7}" dt="2026-05-12T17:39:35.634" v="2"/>
+        <pc:sldMkLst>
+          <pc:docMk/>
+          <pc:sldMk cId="3935255247" sldId="855"/>
+        </pc:sldMkLst>
+      </pc:sldChg>
+    </pc:docChg>
+  </pc:docChgLst>
+</pc:chgInfo>
+</file>
+
 <file path=ppt/notesMasters/notesMaster1.xml><?xml version="1.0" encoding="utf-8"?>
 <p:notesMaster xmlns:a="http://schemas.openxmlformats.org/drawingml/2006/main" xmlns:r="http://schemas.openxmlformats.org/officeDocument/2006/relationships" xmlns:p="http://schemas.openxmlformats.org/presentationml/2006/main">
   <p:cSld>
@@ -235,7 +264,7 @@
           <a:p>
             <a:fld id="{2D445F07-8756-451B-A938-0248325FC7BB}" type="datetimeFigureOut">
               <a:rPr lang="es-MX" smtClean="0"/>
-              <a:t>12/02/2025</a:t>
+              <a:t>12/05/2026</a:t>
             </a:fld>
             <a:endParaRPr lang="es-MX" dirty="0"/>
           </a:p>
@@ -394,7 +423,7 @@
           <a:p>
             <a:fld id="{5993AEC0-242E-4FA7-9D3C-51E1036AC3CB}" type="slidenum">
               <a:rPr lang="es-MX" smtClean="0"/>
-              <a:t>‹#›</a:t>
+              <a:t>‹Nº›</a:t>
             </a:fld>
             <a:endParaRPr lang="es-MX" dirty="0"/>
           </a:p>
@@ -1868,7 +1897,7 @@
           <a:p>
             <a:fld id="{5E75A0DC-66C6-4CEC-A5EB-F8C97CEC3796}" type="datetimeFigureOut">
               <a:rPr lang="es-MX" smtClean="0"/>
-              <a:t>12/02/2025</a:t>
+              <a:t>12/05/2026</a:t>
             </a:fld>
             <a:endParaRPr lang="es-MX" dirty="0"/>
           </a:p>
@@ -1910,7 +1939,7 @@
           <a:p>
             <a:fld id="{C077EE1E-7A06-4E7F-9AFB-189FC69B7B0C}" type="slidenum">
               <a:rPr lang="es-MX" smtClean="0"/>
-              <a:t>‹#›</a:t>
+              <a:t>‹Nº›</a:t>
             </a:fld>
             <a:endParaRPr lang="es-MX" dirty="0"/>
           </a:p>
@@ -2038,7 +2067,7 @@
           <a:p>
             <a:fld id="{5E75A0DC-66C6-4CEC-A5EB-F8C97CEC3796}" type="datetimeFigureOut">
               <a:rPr lang="es-MX" smtClean="0"/>
-              <a:t>12/02/2025</a:t>
+              <a:t>12/05/2026</a:t>
             </a:fld>
             <a:endParaRPr lang="es-MX" dirty="0"/>
           </a:p>
@@ -2080,7 +2109,7 @@
           <a:p>
             <a:fld id="{C077EE1E-7A06-4E7F-9AFB-189FC69B7B0C}" type="slidenum">
               <a:rPr lang="es-MX" smtClean="0"/>
-              <a:t>‹#›</a:t>
+              <a:t>‹Nº›</a:t>
             </a:fld>
             <a:endParaRPr lang="es-MX" dirty="0"/>
           </a:p>
@@ -2218,7 +2247,7 @@
           <a:p>
             <a:fld id="{5E75A0DC-66C6-4CEC-A5EB-F8C97CEC3796}" type="datetimeFigureOut">
               <a:rPr lang="es-MX" smtClean="0"/>
-              <a:t>12/02/2025</a:t>
+              <a:t>12/05/2026</a:t>
             </a:fld>
             <a:endParaRPr lang="es-MX" dirty="0"/>
           </a:p>
@@ -2260,7 +2289,7 @@
           <a:p>
             <a:fld id="{C077EE1E-7A06-4E7F-9AFB-189FC69B7B0C}" type="slidenum">
               <a:rPr lang="es-MX" smtClean="0"/>
-              <a:t>‹#›</a:t>
+              <a:t>‹Nº›</a:t>
             </a:fld>
             <a:endParaRPr lang="es-MX" dirty="0"/>
           </a:p>
@@ -2339,7 +2368,7 @@
               <a:pPr defTabSz="385763">
                 <a:defRPr/>
               </a:pPr>
-              <a:t>‹#›</a:t>
+              <a:t>‹Nº›</a:t>
             </a:fld>
             <a:endParaRPr lang="en-US" kern="0" dirty="0">
               <a:solidFill>
@@ -2693,7 +2722,7 @@
           <a:p>
             <a:fld id="{5E75A0DC-66C6-4CEC-A5EB-F8C97CEC3796}" type="datetimeFigureOut">
               <a:rPr lang="es-MX" smtClean="0"/>
-              <a:t>12/02/2025</a:t>
+              <a:t>12/05/2026</a:t>
             </a:fld>
             <a:endParaRPr lang="es-MX" dirty="0"/>
           </a:p>
@@ -2735,7 +2764,7 @@
           <a:p>
             <a:fld id="{C077EE1E-7A06-4E7F-9AFB-189FC69B7B0C}" type="slidenum">
               <a:rPr lang="es-MX" smtClean="0"/>
-              <a:t>‹#›</a:t>
+              <a:t>‹Nº›</a:t>
             </a:fld>
             <a:endParaRPr lang="es-MX" dirty="0"/>
           </a:p>
@@ -2939,7 +2968,7 @@
           <a:p>
             <a:fld id="{5E75A0DC-66C6-4CEC-A5EB-F8C97CEC3796}" type="datetimeFigureOut">
               <a:rPr lang="es-MX" smtClean="0"/>
-              <a:t>12/02/2025</a:t>
+              <a:t>12/05/2026</a:t>
             </a:fld>
             <a:endParaRPr lang="es-MX" dirty="0"/>
           </a:p>
@@ -2981,7 +3010,7 @@
           <a:p>
             <a:fld id="{C077EE1E-7A06-4E7F-9AFB-189FC69B7B0C}" type="slidenum">
               <a:rPr lang="es-MX" smtClean="0"/>
-              <a:t>‹#›</a:t>
+              <a:t>‹Nº›</a:t>
             </a:fld>
             <a:endParaRPr lang="es-MX" dirty="0"/>
           </a:p>
@@ -3227,7 +3256,7 @@
           <a:p>
             <a:fld id="{5E75A0DC-66C6-4CEC-A5EB-F8C97CEC3796}" type="datetimeFigureOut">
               <a:rPr lang="es-MX" smtClean="0"/>
-              <a:t>12/02/2025</a:t>
+              <a:t>12/05/2026</a:t>
             </a:fld>
             <a:endParaRPr lang="es-MX" dirty="0"/>
           </a:p>
@@ -3269,7 +3298,7 @@
           <a:p>
             <a:fld id="{C077EE1E-7A06-4E7F-9AFB-189FC69B7B0C}" type="slidenum">
               <a:rPr lang="es-MX" smtClean="0"/>
-              <a:t>‹#›</a:t>
+              <a:t>‹Nº›</a:t>
             </a:fld>
             <a:endParaRPr lang="es-MX" dirty="0"/>
           </a:p>
@@ -3649,7 +3678,7 @@
           <a:p>
             <a:fld id="{5E75A0DC-66C6-4CEC-A5EB-F8C97CEC3796}" type="datetimeFigureOut">
               <a:rPr lang="es-MX" smtClean="0"/>
-              <a:t>12/02/2025</a:t>
+              <a:t>12/05/2026</a:t>
             </a:fld>
             <a:endParaRPr lang="es-MX" dirty="0"/>
           </a:p>
@@ -3691,7 +3720,7 @@
           <a:p>
             <a:fld id="{C077EE1E-7A06-4E7F-9AFB-189FC69B7B0C}" type="slidenum">
               <a:rPr lang="es-MX" smtClean="0"/>
-              <a:t>‹#›</a:t>
+              <a:t>‹Nº›</a:t>
             </a:fld>
             <a:endParaRPr lang="es-MX" dirty="0"/>
           </a:p>
@@ -3767,7 +3796,7 @@
           <a:p>
             <a:fld id="{5E75A0DC-66C6-4CEC-A5EB-F8C97CEC3796}" type="datetimeFigureOut">
               <a:rPr lang="es-MX" smtClean="0"/>
-              <a:t>12/02/2025</a:t>
+              <a:t>12/05/2026</a:t>
             </a:fld>
             <a:endParaRPr lang="es-MX" dirty="0"/>
           </a:p>
@@ -3809,7 +3838,7 @@
           <a:p>
             <a:fld id="{C077EE1E-7A06-4E7F-9AFB-189FC69B7B0C}" type="slidenum">
               <a:rPr lang="es-MX" smtClean="0"/>
-              <a:t>‹#›</a:t>
+              <a:t>‹Nº›</a:t>
             </a:fld>
             <a:endParaRPr lang="es-MX" dirty="0"/>
           </a:p>
@@ -3862,7 +3891,7 @@
           <a:p>
             <a:fld id="{5E75A0DC-66C6-4CEC-A5EB-F8C97CEC3796}" type="datetimeFigureOut">
               <a:rPr lang="es-MX" smtClean="0"/>
-              <a:t>12/02/2025</a:t>
+              <a:t>12/05/2026</a:t>
             </a:fld>
             <a:endParaRPr lang="es-MX" dirty="0"/>
           </a:p>
@@ -3904,7 +3933,7 @@
           <a:p>
             <a:fld id="{C077EE1E-7A06-4E7F-9AFB-189FC69B7B0C}" type="slidenum">
               <a:rPr lang="es-MX" smtClean="0"/>
-              <a:t>‹#›</a:t>
+              <a:t>‹Nº›</a:t>
             </a:fld>
             <a:endParaRPr lang="es-MX" dirty="0"/>
           </a:p>
@@ -4139,7 +4168,7 @@
           <a:p>
             <a:fld id="{5E75A0DC-66C6-4CEC-A5EB-F8C97CEC3796}" type="datetimeFigureOut">
               <a:rPr lang="es-MX" smtClean="0"/>
-              <a:t>12/02/2025</a:t>
+              <a:t>12/05/2026</a:t>
             </a:fld>
             <a:endParaRPr lang="es-MX" dirty="0"/>
           </a:p>
@@ -4181,7 +4210,7 @@
           <a:p>
             <a:fld id="{C077EE1E-7A06-4E7F-9AFB-189FC69B7B0C}" type="slidenum">
               <a:rPr lang="es-MX" smtClean="0"/>
-              <a:t>‹#›</a:t>
+              <a:t>‹Nº›</a:t>
             </a:fld>
             <a:endParaRPr lang="es-MX" dirty="0"/>
           </a:p>
@@ -4392,7 +4421,7 @@
           <a:p>
             <a:fld id="{5E75A0DC-66C6-4CEC-A5EB-F8C97CEC3796}" type="datetimeFigureOut">
               <a:rPr lang="es-MX" smtClean="0"/>
-              <a:t>12/02/2025</a:t>
+              <a:t>12/05/2026</a:t>
             </a:fld>
             <a:endParaRPr lang="es-MX" dirty="0"/>
           </a:p>
@@ -4434,7 +4463,7 @@
           <a:p>
             <a:fld id="{C077EE1E-7A06-4E7F-9AFB-189FC69B7B0C}" type="slidenum">
               <a:rPr lang="es-MX" smtClean="0"/>
-              <a:t>‹#›</a:t>
+              <a:t>‹Nº›</a:t>
             </a:fld>
             <a:endParaRPr lang="es-MX" dirty="0"/>
           </a:p>
@@ -4605,7 +4634,7 @@
           <a:p>
             <a:fld id="{5E75A0DC-66C6-4CEC-A5EB-F8C97CEC3796}" type="datetimeFigureOut">
               <a:rPr lang="es-MX" smtClean="0"/>
-              <a:t>12/02/2025</a:t>
+              <a:t>12/05/2026</a:t>
             </a:fld>
             <a:endParaRPr lang="es-MX" dirty="0"/>
           </a:p>
@@ -4683,7 +4712,7 @@
           <a:p>
             <a:fld id="{C077EE1E-7A06-4E7F-9AFB-189FC69B7B0C}" type="slidenum">
               <a:rPr lang="es-MX" smtClean="0"/>
-              <a:t>‹#›</a:t>
+              <a:t>‹Nº›</a:t>
             </a:fld>
             <a:endParaRPr lang="es-MX" dirty="0"/>
           </a:p>
@@ -12451,7 +12480,7 @@
                                           </p:stCondLst>
                                         </p:cTn>
                                         <p:tgtEl>
-                                          <p:spTgt spid="13"/>
+                                          <p:spTgt spid="5"/>
                                         </p:tgtEl>
                                         <p:attrNameLst>
                                           <p:attrName>style.visibility</p:attrName>
@@ -12465,7 +12494,7 @@
                                       <p:cBhvr>
                                         <p:cTn id="17" dur="500"/>
                                         <p:tgtEl>
-                                          <p:spTgt spid="13"/>
+                                          <p:spTgt spid="5"/>
                                         </p:tgtEl>
                                       </p:cBhvr>
                                     </p:animEffect>
@@ -12491,7 +12520,7 @@
                             </p:stCondLst>
                             <p:childTnLst>
                               <p:par>
-                                <p:cTn id="20" presetID="1" presetClass="entr" presetSubtype="0" fill="hold" nodeType="clickEffect">
+                                <p:cTn id="20" presetID="4" presetClass="entr" presetSubtype="16" fill="hold" grpId="0" nodeType="clickEffect">
                                   <p:stCondLst>
                                     <p:cond delay="0"/>
                                   </p:stCondLst>
@@ -12504,52 +12533,7 @@
                                           </p:stCondLst>
                                         </p:cTn>
                                         <p:tgtEl>
-                                          <p:spTgt spid="3"/>
-                                        </p:tgtEl>
-                                        <p:attrNameLst>
-                                          <p:attrName>style.visibility</p:attrName>
-                                        </p:attrNameLst>
-                                      </p:cBhvr>
-                                      <p:to>
-                                        <p:strVal val="visible"/>
-                                      </p:to>
-                                    </p:set>
-                                  </p:childTnLst>
-                                </p:cTn>
-                              </p:par>
-                            </p:childTnLst>
-                          </p:cTn>
-                        </p:par>
-                      </p:childTnLst>
-                    </p:cTn>
-                  </p:par>
-                  <p:par>
-                    <p:cTn id="22" fill="hold">
-                      <p:stCondLst>
-                        <p:cond delay="indefinite"/>
-                      </p:stCondLst>
-                      <p:childTnLst>
-                        <p:par>
-                          <p:cTn id="23" fill="hold">
-                            <p:stCondLst>
-                              <p:cond delay="0"/>
-                            </p:stCondLst>
-                            <p:childTnLst>
-                              <p:par>
-                                <p:cTn id="24" presetID="4" presetClass="entr" presetSubtype="16" fill="hold" grpId="0" nodeType="clickEffect">
-                                  <p:stCondLst>
-                                    <p:cond delay="0"/>
-                                  </p:stCondLst>
-                                  <p:childTnLst>
-                                    <p:set>
-                                      <p:cBhvr>
-                                        <p:cTn id="25" dur="1" fill="hold">
-                                          <p:stCondLst>
-                                            <p:cond delay="0"/>
-                                          </p:stCondLst>
-                                        </p:cTn>
-                                        <p:tgtEl>
-                                          <p:spTgt spid="5"/>
+                                          <p:spTgt spid="13"/>
                                         </p:tgtEl>
                                         <p:attrNameLst>
                                           <p:attrName>style.visibility</p:attrName>
@@ -12561,9 +12545,9 @@
                                     </p:set>
                                     <p:animEffect transition="in" filter="box(in)">
                                       <p:cBhvr>
-                                        <p:cTn id="26" dur="500"/>
+                                        <p:cTn id="22" dur="500"/>
                                         <p:tgtEl>
-                                          <p:spTgt spid="5"/>
+                                          <p:spTgt spid="13"/>
                                         </p:tgtEl>
                                       </p:cBhvr>
                                     </p:animEffect>
@@ -12577,26 +12561,26 @@
                     </p:cTn>
                   </p:par>
                   <p:par>
-                    <p:cTn id="27" fill="hold">
+                    <p:cTn id="23" fill="hold">
                       <p:stCondLst>
                         <p:cond delay="indefinite"/>
                       </p:stCondLst>
                       <p:childTnLst>
                         <p:par>
-                          <p:cTn id="28" fill="hold">
+                          <p:cTn id="24" fill="hold">
                             <p:stCondLst>
                               <p:cond delay="0"/>
                             </p:stCondLst>
                             <p:childTnLst>
                               <p:par>
-                                <p:cTn id="29" presetID="4" presetClass="entr" presetSubtype="16" fill="hold" grpId="0" nodeType="clickEffect">
+                                <p:cTn id="25" presetID="4" presetClass="entr" presetSubtype="16" fill="hold" grpId="0" nodeType="clickEffect">
                                   <p:stCondLst>
                                     <p:cond delay="0"/>
                                   </p:stCondLst>
                                   <p:childTnLst>
                                     <p:set>
                                       <p:cBhvr>
-                                        <p:cTn id="30" dur="1" fill="hold">
+                                        <p:cTn id="26" dur="1" fill="hold">
                                           <p:stCondLst>
                                             <p:cond delay="0"/>
                                           </p:stCondLst>
@@ -12614,12 +12598,57 @@
                                     </p:set>
                                     <p:animEffect transition="in" filter="box(in)">
                                       <p:cBhvr>
-                                        <p:cTn id="31" dur="500"/>
+                                        <p:cTn id="27" dur="500"/>
                                         <p:tgtEl>
                                           <p:spTgt spid="6"/>
                                         </p:tgtEl>
                                       </p:cBhvr>
                                     </p:animEffect>
+                                  </p:childTnLst>
+                                </p:cTn>
+                              </p:par>
+                            </p:childTnLst>
+                          </p:cTn>
+                        </p:par>
+                      </p:childTnLst>
+                    </p:cTn>
+                  </p:par>
+                  <p:par>
+                    <p:cTn id="28" fill="hold">
+                      <p:stCondLst>
+                        <p:cond delay="indefinite"/>
+                      </p:stCondLst>
+                      <p:childTnLst>
+                        <p:par>
+                          <p:cTn id="29" fill="hold">
+                            <p:stCondLst>
+                              <p:cond delay="0"/>
+                            </p:stCondLst>
+                            <p:childTnLst>
+                              <p:par>
+                                <p:cTn id="30" presetID="1" presetClass="entr" presetSubtype="0" fill="hold" nodeType="clickEffect">
+                                  <p:stCondLst>
+                                    <p:cond delay="0"/>
+                                  </p:stCondLst>
+                                  <p:childTnLst>
+                                    <p:set>
+                                      <p:cBhvr>
+                                        <p:cTn id="31" dur="1" fill="hold">
+                                          <p:stCondLst>
+                                            <p:cond delay="0"/>
+                                          </p:stCondLst>
+                                        </p:cTn>
+                                        <p:tgtEl>
+                                          <p:spTgt spid="3"/>
+                                        </p:tgtEl>
+                                        <p:attrNameLst>
+                                          <p:attrName>style.visibility</p:attrName>
+                                        </p:attrNameLst>
+                                      </p:cBhvr>
+                                      <p:to>
+                                        <p:strVal val="visible"/>
+                                      </p:to>
+                                    </p:set>
                                   </p:childTnLst>
                                 </p:cTn>
                               </p:par>
